--- a/public/Yucu_Protocol_Stellar_PitchDeck.pptx
+++ b/public/Yucu_Protocol_Stellar_PitchDeck.pptx
@@ -516,7 +516,7 @@
           <a:p>
             <a:r>
               <a:rPr lang="en-US" dirty="0"/>
-              <a:t>Good morning, Denelle and members of the Stellar leadership team. I am José Alfredo Román Cruz, computer science faculty lead at TecNM Tlaxiaco in Oaxaca, Mexico. Today, on behalf of our university and our student researchers, we present Raíz Protocol. Raíz is an open-source, foundational infrastructure primitive built on Soroban. It delivers what Stellar has uniquely championed from day one: transforming financial access from an abstract promise into mathematical certainty for the most marginalized, resilient producers on Earth.</a:t>
+              <a:t>Good morning, Denelle and members of the Stellar leadership team. I am José Alfredo Román Cruz, computer science faculty lead at TecNM Tlaxiaco in Oaxaca, Mexico. Today, on behalf of our university and our student researchers, we present Yucu Protocol. Yucu is an open-source, foundational infrastructure primitive built on Soroban. It delivers what Stellar has uniquely championed from day one: transforming financial access from an abstract promise into mathematical certainty for the most marginalized, resilient producers on Earth.</a:t>
             </a:r>
             <a:endParaRPr lang="en-US" dirty="0"/>
           </a:p>
@@ -604,7 +604,7 @@
           <a:p>
             <a:r>
               <a:rPr lang="en-US" dirty="0"/>
-              <a:t>If a financial system requires a 70-year-old indigenous farmer to write down a 24-word English seed phrase, it is exclusionary by design. Raíz makes Web3 completely invisible: the producer speaks in Mixtec, and the funds arrive in pesos without friction.</a:t>
+              <a:t>If a financial system requires a 70-year-old indigenous farmer to write down a 24-word English seed phrase, it is exclusionary by design. Yucu makes Web3 completely invisible: the producer speaks in Mixtec, and the funds arrive in pesos without friction.</a:t>
             </a:r>
             <a:endParaRPr lang="en-US" dirty="0"/>
           </a:p>
@@ -692,7 +692,7 @@
           <a:p>
             <a:r>
               <a:rPr lang="en-US" dirty="0"/>
-              <a:t>Our commercial engine follows the Tech Rebel product methodology. We do not charge the artisans. Our paying clients are European coffee importers and luxury boutiques who face severe regulatory penalties and brand crises if their supply chains lack verifiable proof. Raíz turns compliance into a seamless one-click Soroban transaction, generating sustainable revenue while protecting primary producers.</a:t>
+              <a:t>Our commercial engine follows the Tech Rebel product methodology. We do not charge the artisans. Our paying clients are European coffee importers and luxury boutiques who face severe regulatory penalties and brand crises if their supply chains lack verifiable proof. Yucu turns compliance into a seamless one-click Soroban transaction, generating sustainable revenue while protecting primary producers.</a:t>
             </a:r>
             <a:endParaRPr lang="en-US" dirty="0"/>
           </a:p>
@@ -868,7 +868,7 @@
           <a:p>
             <a:r>
               <a:rPr lang="en-US" dirty="0"/>
-              <a:t>This project is neither outsourced nor speculative: it is the direct creation of over 12 undergraduate computer engineering students from TecNM Campus Tlaxiaco. They traveled to mountain villages, interviewed cooperative leaders, and are writing Soroban smart contracts in Rust. Funding Raíz via Drips and Stellar directly seeds Latin America's next generation of indigenous Web3 developers.</a:t>
+              <a:t>This project is neither outsourced nor speculative: it is the direct creation of over 12 undergraduate computer engineering students from TecNM Campus Tlaxiaco. They traveled to mountain villages, interviewed cooperative leaders, and are writing Soroban smart contracts in Rust. Funding Yucu via Drips and Stellar directly seeds Latin America's next generation of indigenous Web3 developers.</a:t>
             </a:r>
             <a:endParaRPr lang="en-US" dirty="0"/>
           </a:p>
@@ -1044,7 +1044,7 @@
           <a:p>
             <a:r>
               <a:rPr lang="en-US" dirty="0"/>
-              <a:t>Denelle, thank you for building an ecosystem that makes this possible. We invite the Stellar Development Foundation to partner with Open Hub TecNM to make Raíz the global standard for RWA attestations on Soroban. Thank you.</a:t>
+              <a:t>Denelle, thank you for building an ecosystem that makes this possible. We invite the Stellar Development Foundation to partner with Open Hub TecNM to make Yucu the global standard for RWA attestations on Soroban. Thank you.</a:t>
             </a:r>
             <a:endParaRPr lang="en-US" dirty="0"/>
           </a:p>
@@ -1132,7 +1132,7 @@
           <a:p>
             <a:r>
               <a:rPr lang="en-US" dirty="0"/>
-              <a:t>Denelle, our engineering students did not formulate this problem from a laboratory. They traveled directly to San José Xochixtlán, San Pablo Tijaltepec, and Magdalena Peñasco. They documented that indigenous master weavers and coffee farmers perform 90% of the labor, bear 100% of the physical risk, yet retain less than 10% of the economic value. The system is designed to keep them unbanked and dependent. Raíz was engineered to break this extraction cycle through code.</a:t>
+              <a:t>Denelle, our engineering students did not formulate this problem from a laboratory. They traveled directly to San José Xochixtlán, San Pablo Tijaltepec, and Magdalena Peñasco. They documented that indigenous master weavers and coffee farmers perform 90% of the labor, bear 100% of the physical risk, yet retain less than 10% of the economic value. The system is designed to keep them unbanked and dependent. Yucu was engineered to break this extraction cycle through code.</a:t>
             </a:r>
             <a:endParaRPr lang="en-US" dirty="0"/>
           </a:p>
@@ -1220,7 +1220,7 @@
           <a:p>
             <a:r>
               <a:rPr lang="en-US" dirty="0"/>
-              <a:t>This data was gathered directly by our student researchers in the Mixteca mountains. In the comparative chart on the left, you can see the red bars representing what the producer currently receives: only 7% for a master textile and 18% for specialty coffee. The orange bars represent what the coyote middleman captures. The green bar is what Raíz guarantees: 98% direct payout to the creator and 2% to the communal Tequio fund. Furthermore, our usability testing proved that replacing English text with spoken Mixtec improved elderly completion rates from 12% to 96%.</a:t>
+              <a:t>This data was gathered directly by our student researchers in the Mixteca mountains. In the comparative chart on the left, you can see the red bars representing what the producer currently receives: only 7% for a master textile and 18% for specialty coffee. The orange bars represent what the coyote middleman captures. The green bar is what Yucu guarantees: 98% direct payout to the creator and 2% to the communal Tequio fund. Furthermore, our usability testing proved that replacing English text with spoken Mixtec improved elderly completion rates from 12% to 96%.</a:t>
             </a:r>
             <a:endParaRPr lang="en-US" dirty="0"/>
           </a:p>
@@ -1308,7 +1308,7 @@
           <a:p>
             <a:r>
               <a:rPr lang="en-US" dirty="0"/>
-              <a:t>These are the four undergraduate student research teams from TecNM Campus Tlaxiaco. In San Juan Mixtepec, they uncovered that elderly palm weavers earn barely $1.00 MXN per hour while urban retailers mark up the products by +1000%. In San José Xochixtlán, an authentic huipil takes 9 months of labor. In San Juan Ñumí, honey harvest records were being lost in old paper notebooks. Raíz was engineered specifically around these empirical field realities.</a:t>
+              <a:t>These are the four undergraduate student research teams from TecNM Campus Tlaxiaco. In San Juan Mixtepec, they uncovered that elderly palm weavers earn barely $1.00 MXN per hour while urban retailers mark up the products by +1000%. In San José Xochixtlán, an authentic huipil takes 9 months of labor. In San Juan Ñumí, honey harvest records were being lost in old paper notebooks. Yucu was engineered specifically around these empirical field realities.</a:t>
             </a:r>
             <a:endParaRPr lang="en-US" dirty="0"/>
           </a:p>
@@ -1396,7 +1396,7 @@
           <a:p>
             <a:r>
               <a:rPr lang="en-US" dirty="0"/>
-              <a:t>This slide demonstrates that Raíz is deeply grounded in human-centered design. Our students brought mobile devices to mountain workshops, timed user tasks with stopwatches, and diagnosed the fear of breaking the phone in Doña Reyna and Doña Francisca. That directly drove our 112px tactile design, spoken Mixtec interface, and physical Hang-Tag QR codes that reduce cognitive friction to zero.</a:t>
+              <a:t>This slide demonstrates that Yucu is deeply grounded in human-centered design. Our students brought mobile devices to mountain workshops, timed user tasks with stopwatches, and diagnosed the fear of breaking the phone in a Triqui weaver and an embroiderer from Tijaltepec. That directly drove our 112px tactile design, spoken Mixtec interface, and physical Hang-Tag QR codes that reduce cognitive friction to zero.</a:t>
             </a:r>
             <a:endParaRPr lang="en-US" dirty="0"/>
           </a:p>
@@ -1748,7 +1748,7 @@
           <a:p>
             <a:r>
               <a:rPr lang="en-US" dirty="0"/>
-              <a:t>For the consumer in Lisbon or Tokyo, the experience is instant. They scan the garment tag and listen to Doña Reyna speak in her mother tongue, with the immutable Stellar hash proving this huipil took 9 months of genuine craftsmanship.</a:t>
+              <a:t>For the consumer in Lisbon or Tokyo, the experience is instant. They scan the garment tag and listen to the weaver speak in her mother tongue, with the immutable Stellar hash proving this huipil took 9 months of genuine craftsmanship.</a:t>
             </a:r>
             <a:endParaRPr lang="en-US" dirty="0"/>
           </a:p>
@@ -2936,7 +2936,7 @@
                 <a:ea typeface="Arial" pitchFamily="34" charset="-122"/>
                 <a:cs typeface="Arial" pitchFamily="34" charset="-120"/>
               </a:rPr>
-              <a:t>Laminated physical QR Identity Cards (Carnet de Productor) or SMS/WhatsApp OTPs. Zero English seed phrases to memorize or lose.</a:t>
+              <a:t>Laminated physical QR Identity Cards (Carnet de Productor) or SMS OTPs. Zero English seed phrases to memorize or lose.</a:t>
             </a:r>
             <a:endParaRPr lang="en-US" sz="1100" dirty="0"/>
           </a:p>
@@ -3254,7 +3254,7 @@
                 <a:ea typeface="Arial" pitchFamily="34" charset="-122"/>
                 <a:cs typeface="Arial" pitchFamily="34" charset="-120"/>
               </a:rPr>
-              <a:t>The Raíz relayer engine sponsors 100% of network transaction fees. Rural producers never purchase, hold, or calculate gas in XLM.</a:t>
+              <a:t>The Yucu relayer engine sponsors 100% of network transaction fees. Rural producers never purchase, hold, or calculate gas in XLM.</a:t>
             </a:r>
             <a:endParaRPr lang="en-US" sz="1100" dirty="0"/>
           </a:p>
@@ -4768,7 +4768,7 @@
                 <a:ea typeface="Arial" pitchFamily="34" charset="-122"/>
                 <a:cs typeface="Arial" pitchFamily="34" charset="-120"/>
               </a:rPr>
-              <a:t>Active public repo at github.com/Open-Hub-Tec/raiz with daily commits from engineering residents.</a:t>
+              <a:t>Active public repo at github.com/Open-Hub-Tec/yucu with daily commits from engineering residents.</a:t>
             </a:r>
             <a:endParaRPr lang="en-US" sz="1100" dirty="0"/>
           </a:p>
@@ -5591,7 +5591,7 @@
                 <a:ea typeface="Arial" pitchFamily="34" charset="-122"/>
                 <a:cs typeface="Arial" pitchFamily="34" charset="-120"/>
               </a:rPr>
-              <a:t>Jazlynn Barrios Velasco (ID 23620209)</a:t>
+              <a:t>Jazlynn Barrios Velasco</a:t>
             </a:r>
             <a:endParaRPr lang="en-US" sz="900" dirty="0"/>
           </a:p>
@@ -5669,7 +5669,7 @@
                 <a:ea typeface="Arial" pitchFamily="34" charset="-122"/>
                 <a:cs typeface="Arial" pitchFamily="34" charset="-120"/>
               </a:rPr>
-              <a:t>Isaías Brayan López Domínguez (ID 23620031)</a:t>
+              <a:t>Isaías Brayan López Domínguez</a:t>
             </a:r>
             <a:endParaRPr lang="en-US" sz="900" dirty="0"/>
           </a:p>
@@ -5747,7 +5747,7 @@
                 <a:ea typeface="Arial" pitchFamily="34" charset="-122"/>
                 <a:cs typeface="Arial" pitchFamily="34" charset="-120"/>
               </a:rPr>
-              <a:t>Rafael Ayala Coronel (23620203), Alex Victoria (23620281)</a:t>
+              <a:t>Rafael Ayala Coronel, Alex Victoria</a:t>
             </a:r>
             <a:endParaRPr lang="en-US" sz="900" dirty="0"/>
           </a:p>
@@ -7027,7 +7027,7 @@
                 <a:ea typeface="Arial" pitchFamily="34" charset="-122"/>
                 <a:cs typeface="Arial" pitchFamily="34" charset="-120"/>
               </a:rPr>
-              <a:t>Feature Raíz at Meridian Lisbon as an exemplar of Protocol 22 utility, showcasing live cross-border purchases between European buyers and Oaxacan indigenous producers.</a:t>
+              <a:t>Feature Yucu at Meridian Lisbon as an exemplar of Protocol 22 utility, showcasing live cross-border purchases between European buyers and Oaxacan indigenous producers.</a:t>
             </a:r>
             <a:endParaRPr lang="en-US" sz="1100" dirty="0"/>
           </a:p>
@@ -7388,7 +7388,7 @@
                 <a:ea typeface="Arial" pitchFamily="34" charset="-122"/>
                 <a:cs typeface="Arial" pitchFamily="34" charset="-120"/>
               </a:rPr>
-              <a:t>https://github.com/Open-Hub-Tec/raiz</a:t>
+              <a:t>https://github.com/Open-Hub-Tec/yucu</a:t>
             </a:r>
             <a:endParaRPr lang="en-US" sz="1200" dirty="0"/>
           </a:p>
@@ -8515,7 +8515,7 @@
                 <a:ea typeface="Arial" pitchFamily="34" charset="-122"/>
                 <a:cs typeface="Arial" pitchFamily="34" charset="-120"/>
               </a:rPr>
-              <a:t>With Raíz (Soroban)</a:t>
+              <a:t>With Yucu (Soroban)</a:t>
             </a:r>
             <a:endParaRPr lang="en-US" sz="850" dirty="0"/>
           </a:p>
@@ -8746,7 +8746,7 @@
                 <a:ea typeface="Arial" pitchFamily="34" charset="-122"/>
                 <a:cs typeface="Arial" pitchFamily="34" charset="-120"/>
               </a:rPr>
-              <a:t>Raíz Protocol: 98% Direct to Producer</a:t>
+              <a:t>Yucu Protocol: 98% Direct to Producer</a:t>
             </a:r>
             <a:endParaRPr lang="en-US" sz="800" dirty="0"/>
           </a:p>
@@ -9002,7 +9002,7 @@
                 <a:ea typeface="Arial" pitchFamily="34" charset="-122"/>
                 <a:cs typeface="Arial" pitchFamily="34" charset="-120"/>
               </a:rPr>
-              <a:t>Raíz Protocol: 98% Direct to Producer</a:t>
+              <a:t>Yucu Protocol: 98% Direct to Producer</a:t>
             </a:r>
             <a:endParaRPr lang="en-US" sz="800" dirty="0"/>
           </a:p>
@@ -9258,7 +9258,7 @@
                 <a:ea typeface="Arial" pitchFamily="34" charset="-122"/>
                 <a:cs typeface="Arial" pitchFamily="34" charset="-120"/>
               </a:rPr>
-              <a:t>Raíz Protocol: 98% Direct to Producer</a:t>
+              <a:t>Yucu Protocol: 98% Direct to Producer</a:t>
             </a:r>
             <a:endParaRPr lang="en-US" sz="800" dirty="0"/>
           </a:p>
@@ -9514,7 +9514,7 @@
                 <a:ea typeface="Arial" pitchFamily="34" charset="-122"/>
                 <a:cs typeface="Arial" pitchFamily="34" charset="-120"/>
               </a:rPr>
-              <a:t>Raíz Protocol: 98% Direct to Producer</a:t>
+              <a:t>Yucu Protocol: 98% Direct to Producer</a:t>
             </a:r>
             <a:endParaRPr lang="en-US" sz="800" dirty="0"/>
           </a:p>
@@ -9879,7 +9879,7 @@
                 <a:ea typeface="Arial" pitchFamily="34" charset="-122"/>
                 <a:cs typeface="Arial" pitchFamily="34" charset="-120"/>
               </a:rPr>
-              <a:t>88% of elderly producers failed on standard mobile banking apps due to typing barriers or fear of error. With Raíz’s 112px acoustic voice button, 96% completed their harvest record in &lt;4 seconds without assistance.</a:t>
+              <a:t>88% of elderly producers failed on standard mobile banking apps due to typing barriers or fear of error. With Yucu’s 112px acoustic voice button, 96% completed their harvest record in &lt;4 seconds without assistance.</a:t>
             </a:r>
             <a:endParaRPr lang="en-US" sz="1000" dirty="0"/>
           </a:p>
@@ -11847,7 +11847,7 @@
                 <a:ea typeface="Arial" pitchFamily="34" charset="-122"/>
                 <a:cs typeface="Arial" pitchFamily="34" charset="-120"/>
               </a:rPr>
-              <a:t>Doña Francisca (64): “With this QR tag, people will no longer confuse our blouses with cheap knockoffs.”</a:t>
+              <a:t>Embroiderer, San Pablo Tijaltepec: “With this QR tag, people will no longer confuse our blouses with cheap knockoffs.”</a:t>
             </a:r>
             <a:endParaRPr lang="en-US" sz="800" dirty="0"/>
           </a:p>
@@ -11957,7 +11957,7 @@
                 <a:ea typeface="Arial" pitchFamily="34" charset="-122"/>
                 <a:cs typeface="Arial" pitchFamily="34" charset="-120"/>
               </a:rPr>
-              <a:t>Cognitive Friction Testing with Doña Reyna (56) and Doña Francisca (64) in Rural Outdoor Patios (PR #30 &amp; Issue #2)</a:t>
+              <a:t>Cognitive Friction Testing with a Triqui weaver (56) and an embroiderer from Tijaltepec in Rural Outdoor Patios (PR #30 &amp; Issue #2)</a:t>
             </a:r>
             <a:endParaRPr lang="en-US" sz="1400" dirty="0"/>
           </a:p>
@@ -12492,7 +12492,7 @@
                 <a:ea typeface="Arial" pitchFamily="34" charset="-122"/>
                 <a:cs typeface="Arial" pitchFamily="34" charset="-120"/>
               </a:rPr>
-              <a:t>2. The Raíz Architectural Fix</a:t>
+              <a:t>2. The Yucu Architectural Fix</a:t>
             </a:r>
             <a:endParaRPr lang="en-US" sz="1100" dirty="0"/>
           </a:p>
@@ -13083,7 +13083,7 @@
                 <a:ea typeface="Arial" pitchFamily="34" charset="-122"/>
                 <a:cs typeface="Arial" pitchFamily="34" charset="-120"/>
               </a:rPr>
-              <a:t>Doña Francisca grasped the Hang-Tag instantly: “So nobody confuses our deer blouses with cheap factory knockoffs”.</a:t>
+              <a:t>An embroiderer from Tijaltepec grasped the Hang-Tag instantly: “So nobody confuses our deer blouses with cheap factory knockoffs”.</a:t>
             </a:r>
             <a:endParaRPr lang="en-US" sz="850" dirty="0"/>
           </a:p>
@@ -15041,7 +15041,7 @@
                 <a:ea typeface="Arial" pitchFamily="34" charset="-122"/>
                 <a:cs typeface="Arial" pitchFamily="34" charset="-120"/>
               </a:rPr>
-              <a:t>• Master Weavers (Doña Reyna): </a:t>
+              <a:t>• Master Weavers (Triqui, Xochixtlán): </a:t>
             </a:r>
             <a:pPr indent="0" marL="0">
               <a:lnSpc>
@@ -15779,7 +15779,7 @@
                 <a:ea typeface="Arial" pitchFamily="34" charset="-122"/>
                 <a:cs typeface="Arial" pitchFamily="34" charset="-120"/>
               </a:rPr>
-              <a:t>The consumer listens to Doña Reyna speak in her native Tu’un Savi language, validating the cultural meaning behind every motif.</a:t>
+              <a:t>The consumer listens to the weaver speak in her native Tu’un Savi language, validating the cultural meaning behind every motif.</a:t>
             </a:r>
             <a:endParaRPr lang="en-US" sz="1100" dirty="0"/>
           </a:p>
